--- a/SentinelAI_Atos_Presentation - base.pptx
+++ b/SentinelAI_Atos_Presentation - base.pptx
@@ -7980,14 +7980,8 @@
           </a:bodyPr>
           <a:lstStyle/>
           <a:p>
-            <a:pPr algn="l"/>
-            <a:r>
-              <a:rPr sz="2600" b="1" i="0">
-                <a:solidFill>
-                  <a:srgbClr val="FFFFFF"/>
-                </a:solidFill>
-              </a:rPr>
-              <a:t>Roadmap — P1 Enhancements  (Next 6–12 Months)</a:t>
+            <a:r>
+              <a:t>Roadmap — P1 Enhancements</a:t>
             </a:r>
           </a:p>
         </p:txBody>
@@ -8014,14 +8008,24 @@
           </a:bodyPr>
           <a:lstStyle/>
           <a:p>
-            <a:pPr algn="l"/>
-            <a:r>
-              <a:rPr sz="1300" b="0" i="1">
-                <a:solidFill>
-                  <a:srgbClr val="00BCD4"/>
-                </a:solidFill>
-              </a:rPr>
+            <a:r>
               <a:t>Three capabilities that turn SentinelAI into a core engineering tool</a:t>
+            </a:r>
+          </a:p>
+          <a:p/>
+          <a:p>
+            <a:r>
+              <a:t>• Natural language operational search over ELK and engineering knowledge</a:t>
+            </a:r>
+          </a:p>
+          <a:p>
+            <a:r>
+              <a:t>• Incident correlation using ELK logs, deployments, releases and timeline events from SKS</a:t>
+            </a:r>
+          </a:p>
+          <a:p>
+            <a:r>
+              <a:t>• Deployment regression detection with richer context from changes and incidents</a:t>
             </a:r>
           </a:p>
         </p:txBody>
@@ -8851,14 +8855,8 @@
           </a:bodyPr>
           <a:lstStyle/>
           <a:p>
-            <a:pPr algn="l"/>
-            <a:r>
-              <a:rPr sz="2600" b="1" i="0">
-                <a:solidFill>
-                  <a:srgbClr val="FFFFFF"/>
-                </a:solidFill>
-              </a:rPr>
-              <a:t>Roadmap — P2 Enhancements  (Beyond 12 Months)</a:t>
+            <a:r>
+              <a:t>Roadmap — P2 Enhancements</a:t>
             </a:r>
           </a:p>
         </p:txBody>
@@ -8885,14 +8883,29 @@
           </a:bodyPr>
           <a:lstStyle/>
           <a:p>
-            <a:pPr algn="l"/>
-            <a:r>
-              <a:rPr sz="1300" b="0" i="1">
-                <a:solidFill>
-                  <a:srgbClr val="00BCD4"/>
-                </a:solidFill>
-              </a:rPr>
-              <a:t>Real-time AI monitoring · ITSM automation · Enterprise readiness · LLMOps</a:t>
+            <a:r>
+              <a:t>Real-time AI monitoring · ITSM automation · Enterprise readiness</a:t>
+            </a:r>
+          </a:p>
+          <a:p/>
+          <a:p>
+            <a:r>
+              <a:t>• Real-time ELK/Kafka monitoring with AI-driven investigation</a:t>
+            </a:r>
+          </a:p>
+          <a:p>
+            <a:r>
+              <a:t>• Knowledge Service becomes the enterprise memory backbone for incident context</a:t>
+            </a:r>
+          </a:p>
+          <a:p>
+            <a:r>
+              <a:t>• Jira / Slack / Teams automation with RCA and runbook draft generation</a:t>
+            </a:r>
+          </a:p>
+          <a:p>
+            <a:r>
+              <a:t>• RBAC, audit logging and LLMOps for production rollout</a:t>
             </a:r>
           </a:p>
         </p:txBody>
@@ -9938,13 +9951,7 @@
           </a:bodyPr>
           <a:lstStyle/>
           <a:p>
-            <a:pPr algn="l"/>
-            <a:r>
-              <a:rPr sz="2600" b="1" i="0">
-                <a:solidFill>
-                  <a:srgbClr val="FFFFFF"/>
-                </a:solidFill>
-              </a:rPr>
+            <a:r>
               <a:t>Future Vision — Enterprise AI SRE Copilot</a:t>
             </a:r>
           </a:p>
@@ -9972,14 +9979,29 @@
           </a:bodyPr>
           <a:lstStyle/>
           <a:p>
-            <a:pPr algn="l"/>
-            <a:r>
-              <a:rPr sz="1300" b="0" i="1">
-                <a:solidFill>
-                  <a:srgbClr val="00BCD4"/>
-                </a:solidFill>
-              </a:rPr>
-              <a:t>SentinelAI as the central AI brain for production operations across Atos clients</a:t>
+            <a:r>
+              <a:t>SentinelAI as the central AI brain for production operations</a:t>
+            </a:r>
+          </a:p>
+          <a:p/>
+          <a:p>
+            <a:r>
+              <a:t>• The agent will reason over ELK, Kafka, deployments, releases and engineering knowledge</a:t>
+            </a:r>
+          </a:p>
+          <a:p>
+            <a:r>
+              <a:t>• SentinelAI-Knowledge-Service becomes the memory layer for past incidents and change history</a:t>
+            </a:r>
+          </a:p>
+          <a:p>
+            <a:r>
+              <a:t>• The human approves in minutes while the agent drafts RCA, runbooks and Jira actions</a:t>
+            </a:r>
+          </a:p>
+          <a:p>
+            <a:r>
+              <a:t>• This moves the platform from demo to an enterprise-ready operations copilot</a:t>
             </a:r>
           </a:p>
         </p:txBody>
@@ -12793,13 +12815,7 @@
           </a:bodyPr>
           <a:lstStyle/>
           <a:p>
-            <a:pPr algn="l"/>
-            <a:r>
-              <a:rPr sz="2600" b="1" i="0">
-                <a:solidFill>
-                  <a:srgbClr val="FFFFFF"/>
-                </a:solidFill>
-              </a:rPr>
+            <a:r>
               <a:t>Why an AI Layer on Top of Observability?</a:t>
             </a:r>
           </a:p>
@@ -12827,14 +12843,28 @@
           </a:bodyPr>
           <a:lstStyle/>
           <a:p>
-            <a:pPr algn="l"/>
-            <a:r>
-              <a:rPr sz="1300" b="0" i="1">
-                <a:solidFill>
-                  <a:srgbClr val="00BCD4"/>
-                </a:solidFill>
-              </a:rPr>
-              <a:t>The industry is moving — and we are already building</a:t>
+            <a:r>
+              <a:t>AIOps theory:</a:t>
+            </a:r>
+          </a:p>
+          <a:p>
+            <a:r>
+              <a:t>• Observability data is raw signal, not insight</a:t>
+            </a:r>
+          </a:p>
+          <a:p>
+            <a:r>
+              <a:t>• SentinelAI adds memory, reasoning and live investigation</a:t>
+            </a:r>
+          </a:p>
+          <a:p>
+            <a:r>
+              <a:t>• The platform turns logs into RCA, context and action</a:t>
+            </a:r>
+          </a:p>
+          <a:p>
+            <a:r>
+              <a:t>• Knowledge Service makes each incident reusable for the next one</a:t>
             </a:r>
           </a:p>
         </p:txBody>
@@ -14331,13 +14361,7 @@
           </a:bodyPr>
           <a:lstStyle/>
           <a:p>
-            <a:pPr algn="l"/>
-            <a:r>
-              <a:rPr sz="2600" b="1" i="0">
-                <a:solidFill>
-                  <a:srgbClr val="FFFFFF"/>
-                </a:solidFill>
-              </a:rPr>
+            <a:r>
               <a:t>SentinelAI in One Slide</a:t>
             </a:r>
           </a:p>
@@ -14365,14 +14389,29 @@
           </a:bodyPr>
           <a:lstStyle/>
           <a:p>
-            <a:pPr algn="l"/>
-            <a:r>
-              <a:rPr sz="1300" b="0" i="1">
-                <a:solidFill>
-                  <a:srgbClr val="00BCD4"/>
-                </a:solidFill>
-              </a:rPr>
-              <a:t>An AI-assisted incident investigation platform — built on the stack we already use</a:t>
+            <a:r>
+              <a:t>An AI-assisted incident investigation platform built on the stack we already use</a:t>
+            </a:r>
+          </a:p>
+          <a:p/>
+          <a:p>
+            <a:r>
+              <a:t>• Log RCA: paste or upload logs, generate issue / root cause / impacted service / fix</a:t>
+            </a:r>
+          </a:p>
+          <a:p>
+            <a:r>
+              <a:t>• ELK live investigation: query live logs with service, severity and timeframe</a:t>
+            </a:r>
+          </a:p>
+          <a:p>
+            <a:r>
+              <a:t>• Knowledge Service: adds engineering context from deployments, releases, timeline and Jira</a:t>
+            </a:r>
+          </a:p>
+          <a:p>
+            <a:r>
+              <a:t>• Future: agentic investigation with context-aware reasoning and workflow actions</a:t>
             </a:r>
           </a:p>
         </p:txBody>
@@ -15514,13 +15553,7 @@
           </a:bodyPr>
           <a:lstStyle/>
           <a:p>
-            <a:pPr algn="l"/>
-            <a:r>
-              <a:rPr sz="2600" b="1" i="0">
-                <a:solidFill>
-                  <a:srgbClr val="FFFFFF"/>
-                </a:solidFill>
-              </a:rPr>
+            <a:r>
               <a:t>High-Level Architecture</a:t>
             </a:r>
           </a:p>
@@ -15548,14 +15581,41 @@
           </a:bodyPr>
           <a:lstStyle/>
           <a:p>
-            <a:pPr algn="l"/>
-            <a:r>
-              <a:rPr sz="1300" b="0" i="1">
-                <a:solidFill>
-                  <a:srgbClr val="00BCD4"/>
-                </a:solidFill>
-              </a:rPr>
-              <a:t>Three deployable services + Docker-compose infra</a:t>
+            <a:r>
+              <a:t>Four deployable services + shared infrastructure</a:t>
+            </a:r>
+          </a:p>
+          <a:p/>
+          <a:p>
+            <a:r>
+              <a:t>• sentinelai-ui (React): RCA and ELK investigation views</a:t>
+            </a:r>
+          </a:p>
+          <a:p>
+            <a:r>
+              <a:t>• SentinelAI-Core (Spring Boot): orchestration, RCA, ELK integration and SKS calls</a:t>
+            </a:r>
+          </a:p>
+          <a:p>
+            <a:r>
+              <a:t>• SentinelAI-Engine (FastAPI): provider routing for Groq, Ollama, OpenAI and HuggingFace</a:t>
+            </a:r>
+          </a:p>
+          <a:p>
+            <a:r>
+              <a:t>• SentinelAI-Knowledge-Service (Spring Boot): timeline, releases, deployments and Jira knowledge</a:t>
+            </a:r>
+          </a:p>
+          <a:p/>
+          <a:p>
+            <a:r>
+              <a:t>Infrastructure: PostgreSQL + pgvector, Elasticsearch, Ollama, Docker</a:t>
+            </a:r>
+          </a:p>
+          <a:p/>
+          <a:p>
+            <a:r>
+              <a:t>Draw.io reference: SentinelAI-Architecture-v2.drawio</a:t>
             </a:r>
           </a:p>
         </p:txBody>
@@ -16446,6 +16506,38 @@
                 </a:solidFill>
               </a:rPr>
               <a:t>📡  External inputs:  Elasticsearch logs  ·  Kafka events (P2)  ·  Deployment metadata (P2)  ·  ITSM / alerting (P2)</a:t>
+            </a:r>
+          </a:p>
+        </p:txBody>
+      </p:sp>
+      <p:sp>
+        <p:nvSpPr>
+          <p:cNvPr id="28" name="TextBox 27"/>
+          <p:cNvSpPr txBox="1"/>
+          <p:nvPr/>
+        </p:nvSpPr>
+        <p:spPr>
+          <a:xfrm>
+            <a:off x="502920" y="6400800"/>
+            <a:ext cx="4206240" cy="320040"/>
+          </a:xfrm>
+          <a:prstGeom prst="rect">
+            <a:avLst/>
+          </a:prstGeom>
+          <a:noFill/>
+        </p:spPr>
+        <p:txBody>
+          <a:bodyPr wrap="none">
+            <a:spAutoFit/>
+          </a:bodyPr>
+          <a:lstStyle/>
+          <a:p>
+            <a:pPr algn="l"/>
+            <a:r>
+              <a:rPr>
+                <a:hlinkClick r:id="rId2"/>
+              </a:rPr>
+              <a:t>Open architecture draw.io</a:t>
             </a:r>
           </a:p>
         </p:txBody>
@@ -19483,14 +19575,8 @@
           </a:bodyPr>
           <a:lstStyle/>
           <a:p>
-            <a:pPr algn="l"/>
-            <a:r>
-              <a:rPr sz="2600" b="1" i="0">
-                <a:solidFill>
-                  <a:srgbClr val="FFFFFF"/>
-                </a:solidFill>
-              </a:rPr>
-              <a:t>Existing Capability – Incident Knowledge Base &amp; RAG</a:t>
+            <a:r>
+              <a:t>Existing Capability – Engineering Context &amp; Knowledge</a:t>
             </a:r>
           </a:p>
         </p:txBody>
@@ -19517,14 +19603,29 @@
           </a:bodyPr>
           <a:lstStyle/>
           <a:p>
-            <a:pPr algn="l"/>
-            <a:r>
-              <a:rPr sz="1300" b="0" i="1">
-                <a:solidFill>
-                  <a:srgbClr val="00BCD4"/>
-                </a:solidFill>
-              </a:rPr>
-              <a:t>Every investigation makes future investigations faster and smarter</a:t>
+            <a:r>
+              <a:t>Every investigation becomes reusable knowledge</a:t>
+            </a:r>
+          </a:p>
+          <a:p/>
+          <a:p>
+            <a:r>
+              <a:t>• Core can call SentinelAI-Knowledge-Service for timeline, deployment, release and Jira evidence</a:t>
+            </a:r>
+          </a:p>
+          <a:p>
+            <a:r>
+              <a:t>• That context is appended to the RCA prompt for richer analysis</a:t>
+            </a:r>
+          </a:p>
+          <a:p>
+            <a:r>
+              <a:t>• The UI displays engineering evidence alongside the RCA result</a:t>
+            </a:r>
+          </a:p>
+          <a:p>
+            <a:r>
+              <a:t>• Over time, SentinelAI becomes a living memory layer for incident response</a:t>
             </a:r>
           </a:p>
         </p:txBody>

--- a/SentinelAI_Atos_Presentation - base.pptx
+++ b/SentinelAI_Atos_Presentation - base.pptx
@@ -318,7 +318,7 @@
           <a:p>
             <a:fld id="{5BCAD085-E8A6-8845-BD4E-CB4CCA059FC4}" type="datetimeFigureOut">
               <a:rPr lang="en-US" smtClean="0"/>
-              <a:t>5/13/2026</a:t>
+              <a:t>7/14/2026</a:t>
             </a:fld>
             <a:endParaRPr lang="en-US"/>
           </a:p>
@@ -486,7 +486,7 @@
           <a:p>
             <a:fld id="{5BCAD085-E8A6-8845-BD4E-CB4CCA059FC4}" type="datetimeFigureOut">
               <a:rPr lang="en-US" smtClean="0"/>
-              <a:t>5/13/2026</a:t>
+              <a:t>7/14/2026</a:t>
             </a:fld>
             <a:endParaRPr lang="en-US"/>
           </a:p>
@@ -664,7 +664,7 @@
           <a:p>
             <a:fld id="{5BCAD085-E8A6-8845-BD4E-CB4CCA059FC4}" type="datetimeFigureOut">
               <a:rPr lang="en-US" smtClean="0"/>
-              <a:t>5/13/2026</a:t>
+              <a:t>7/14/2026</a:t>
             </a:fld>
             <a:endParaRPr lang="en-US"/>
           </a:p>
@@ -832,7 +832,7 @@
           <a:p>
             <a:fld id="{5BCAD085-E8A6-8845-BD4E-CB4CCA059FC4}" type="datetimeFigureOut">
               <a:rPr lang="en-US" smtClean="0"/>
-              <a:t>5/13/2026</a:t>
+              <a:t>7/14/2026</a:t>
             </a:fld>
             <a:endParaRPr lang="en-US"/>
           </a:p>
@@ -1077,7 +1077,7 @@
           <a:p>
             <a:fld id="{5BCAD085-E8A6-8845-BD4E-CB4CCA059FC4}" type="datetimeFigureOut">
               <a:rPr lang="en-US" smtClean="0"/>
-              <a:t>5/13/2026</a:t>
+              <a:t>7/14/2026</a:t>
             </a:fld>
             <a:endParaRPr lang="en-US"/>
           </a:p>
@@ -1362,7 +1362,7 @@
           <a:p>
             <a:fld id="{5BCAD085-E8A6-8845-BD4E-CB4CCA059FC4}" type="datetimeFigureOut">
               <a:rPr lang="en-US" smtClean="0"/>
-              <a:t>5/13/2026</a:t>
+              <a:t>7/14/2026</a:t>
             </a:fld>
             <a:endParaRPr lang="en-US"/>
           </a:p>
@@ -1781,7 +1781,7 @@
           <a:p>
             <a:fld id="{5BCAD085-E8A6-8845-BD4E-CB4CCA059FC4}" type="datetimeFigureOut">
               <a:rPr lang="en-US" smtClean="0"/>
-              <a:t>5/13/2026</a:t>
+              <a:t>7/14/2026</a:t>
             </a:fld>
             <a:endParaRPr lang="en-US"/>
           </a:p>
@@ -1898,7 +1898,7 @@
           <a:p>
             <a:fld id="{5BCAD085-E8A6-8845-BD4E-CB4CCA059FC4}" type="datetimeFigureOut">
               <a:rPr lang="en-US" smtClean="0"/>
-              <a:t>5/13/2026</a:t>
+              <a:t>7/14/2026</a:t>
             </a:fld>
             <a:endParaRPr lang="en-US"/>
           </a:p>
@@ -1993,7 +1993,7 @@
           <a:p>
             <a:fld id="{5BCAD085-E8A6-8845-BD4E-CB4CCA059FC4}" type="datetimeFigureOut">
               <a:rPr lang="en-US" smtClean="0"/>
-              <a:t>5/13/2026</a:t>
+              <a:t>7/14/2026</a:t>
             </a:fld>
             <a:endParaRPr lang="en-US"/>
           </a:p>
@@ -2268,7 +2268,7 @@
           <a:p>
             <a:fld id="{5BCAD085-E8A6-8845-BD4E-CB4CCA059FC4}" type="datetimeFigureOut">
               <a:rPr lang="en-US" smtClean="0"/>
-              <a:t>5/13/2026</a:t>
+              <a:t>7/14/2026</a:t>
             </a:fld>
             <a:endParaRPr lang="en-US"/>
           </a:p>
@@ -2520,7 +2520,7 @@
           <a:p>
             <a:fld id="{5BCAD085-E8A6-8845-BD4E-CB4CCA059FC4}" type="datetimeFigureOut">
               <a:rPr lang="en-US" smtClean="0"/>
-              <a:t>5/13/2026</a:t>
+              <a:t>7/14/2026</a:t>
             </a:fld>
             <a:endParaRPr lang="en-US"/>
           </a:p>
@@ -2731,7 +2731,7 @@
           <a:p>
             <a:fld id="{5BCAD085-E8A6-8845-BD4E-CB4CCA059FC4}" type="datetimeFigureOut">
               <a:rPr lang="en-US" smtClean="0"/>
-              <a:t>5/13/2026</a:t>
+              <a:t>7/14/2026</a:t>
             </a:fld>
             <a:endParaRPr lang="en-US"/>
           </a:p>
@@ -8012,7 +8012,9 @@
               <a:t>Three capabilities that turn SentinelAI into a core engineering tool</a:t>
             </a:r>
           </a:p>
-          <a:p/>
+          <a:p>
+            <a:endParaRPr/>
+          </a:p>
           <a:p>
             <a:r>
               <a:t>• Natural language operational search over ELK and engineering knowledge</a:t>
@@ -8887,7 +8889,9 @@
               <a:t>Real-time AI monitoring · ITSM automation · Enterprise readiness</a:t>
             </a:r>
           </a:p>
-          <a:p/>
+          <a:p>
+            <a:endParaRPr/>
+          </a:p>
           <a:p>
             <a:r>
               <a:t>• Real-time ELK/Kafka monitoring with AI-driven investigation</a:t>
@@ -9983,7 +9987,9 @@
               <a:t>SentinelAI as the central AI brain for production operations</a:t>
             </a:r>
           </a:p>
-          <a:p/>
+          <a:p>
+            <a:endParaRPr/>
+          </a:p>
           <a:p>
             <a:r>
               <a:t>• The agent will reason over ELK, Kafka, deployments, releases and engineering knowledge</a:t>
@@ -12802,20 +12808,25 @@
         <p:spPr>
           <a:xfrm>
             <a:off x="457200" y="109728"/>
-            <a:ext cx="11247120" cy="594360"/>
-          </a:xfrm>
-          <a:prstGeom prst="rect">
-            <a:avLst/>
-          </a:prstGeom>
-          <a:noFill/>
-        </p:spPr>
-        <p:txBody>
-          <a:bodyPr wrap="square">
-            <a:spAutoFit/>
-          </a:bodyPr>
-          <a:lstStyle/>
-          <a:p>
-            <a:r>
+            <a:ext cx="11247120" cy="369332"/>
+          </a:xfrm>
+          <a:prstGeom prst="rect">
+            <a:avLst/>
+          </a:prstGeom>
+          <a:noFill/>
+        </p:spPr>
+        <p:txBody>
+          <a:bodyPr wrap="square">
+            <a:spAutoFit/>
+          </a:bodyPr>
+          <a:lstStyle/>
+          <a:p>
+            <a:r>
+              <a:rPr dirty="0">
+                <a:solidFill>
+                  <a:schemeClr val="bg1"/>
+                </a:solidFill>
+              </a:rPr>
               <a:t>Why an AI Layer on Top of Observability?</a:t>
             </a:r>
           </a:p>
@@ -12829,41 +12840,82 @@
         </p:nvSpPr>
         <p:spPr>
           <a:xfrm>
-            <a:off x="457200" y="713232"/>
-            <a:ext cx="11247120" cy="347472"/>
-          </a:xfrm>
-          <a:prstGeom prst="rect">
-            <a:avLst/>
-          </a:prstGeom>
-          <a:noFill/>
-        </p:spPr>
-        <p:txBody>
-          <a:bodyPr wrap="square">
-            <a:spAutoFit/>
-          </a:bodyPr>
-          <a:lstStyle/>
-          <a:p>
-            <a:r>
+            <a:off x="502920" y="506492"/>
+            <a:ext cx="11247120" cy="1477328"/>
+          </a:xfrm>
+          <a:prstGeom prst="rect">
+            <a:avLst/>
+          </a:prstGeom>
+          <a:noFill/>
+        </p:spPr>
+        <p:txBody>
+          <a:bodyPr wrap="square">
+            <a:spAutoFit/>
+          </a:bodyPr>
+          <a:lstStyle/>
+          <a:p>
+            <a:r>
+              <a:rPr dirty="0">
+                <a:solidFill>
+                  <a:schemeClr val="bg1"/>
+                </a:solidFill>
+              </a:rPr>
               <a:t>AIOps theory:</a:t>
             </a:r>
           </a:p>
           <a:p>
             <a:r>
+              <a:rPr dirty="0">
+                <a:solidFill>
+                  <a:schemeClr val="bg1"/>
+                </a:solidFill>
+              </a:rPr>
               <a:t>• Observability data is raw signal, not insight</a:t>
             </a:r>
           </a:p>
           <a:p>
             <a:r>
-              <a:t>• SentinelAI adds memory, reasoning and live investigation</a:t>
-            </a:r>
-          </a:p>
-          <a:p>
-            <a:r>
+              <a:rPr dirty="0">
+                <a:solidFill>
+                  <a:schemeClr val="bg1"/>
+                </a:solidFill>
+              </a:rPr>
+              <a:t>• </a:t>
+            </a:r>
+            <a:r>
+              <a:rPr dirty="0" err="1">
+                <a:solidFill>
+                  <a:schemeClr val="bg1"/>
+                </a:solidFill>
+              </a:rPr>
+              <a:t>SentinelAI</a:t>
+            </a:r>
+            <a:r>
+              <a:rPr dirty="0">
+                <a:solidFill>
+                  <a:schemeClr val="bg1"/>
+                </a:solidFill>
+              </a:rPr>
+              <a:t> adds memory, reasoning and live investigation</a:t>
+            </a:r>
+          </a:p>
+          <a:p>
+            <a:r>
+              <a:rPr dirty="0">
+                <a:solidFill>
+                  <a:schemeClr val="bg1"/>
+                </a:solidFill>
+              </a:rPr>
               <a:t>• The platform turns logs into RCA, context and action</a:t>
             </a:r>
           </a:p>
           <a:p>
             <a:r>
+              <a:rPr dirty="0">
+                <a:solidFill>
+                  <a:schemeClr val="bg1"/>
+                </a:solidFill>
+              </a:rPr>
               <a:t>• Knowledge Service makes each incident reusable for the next one</a:t>
             </a:r>
           </a:p>
@@ -12955,7 +13007,7 @@
         </p:nvSpPr>
         <p:spPr>
           <a:xfrm>
-            <a:off x="457200" y="1234440"/>
+            <a:off x="425132" y="5381244"/>
             <a:ext cx="11247120" cy="749808"/>
           </a:xfrm>
           <a:prstGeom prst="rect">
@@ -13001,7 +13053,7 @@
         </p:nvSpPr>
         <p:spPr>
           <a:xfrm>
-            <a:off x="640080" y="1307592"/>
+            <a:off x="608012" y="5454396"/>
             <a:ext cx="10972800" cy="621792"/>
           </a:xfrm>
           <a:prstGeom prst="rect">
@@ -13017,7 +13069,7 @@
           <a:p>
             <a:pPr algn="l"/>
             <a:r>
-              <a:rPr sz="1300" b="0" i="0">
+              <a:rPr sz="1300" b="0" i="0" dirty="0">
                 <a:solidFill>
                   <a:srgbClr val="FFFFFF"/>
                 </a:solidFill>
@@ -14393,7 +14445,9 @@
               <a:t>An AI-assisted incident investigation platform built on the stack we already use</a:t>
             </a:r>
           </a:p>
-          <a:p/>
+          <a:p>
+            <a:endParaRPr/>
+          </a:p>
           <a:p>
             <a:r>
               <a:t>• Log RCA: paste or upload logs, generate issue / root cause / impacted service / fix</a:t>
@@ -15582,39 +15636,129 @@
           <a:lstStyle/>
           <a:p>
             <a:r>
+              <a:rPr dirty="0"/>
               <a:t>Four deployable services + shared infrastructure</a:t>
             </a:r>
           </a:p>
-          <a:p/>
-          <a:p>
-            <a:r>
-              <a:t>• sentinelai-ui (React): RCA and ELK investigation views</a:t>
-            </a:r>
-          </a:p>
-          <a:p>
-            <a:r>
-              <a:t>• SentinelAI-Core (Spring Boot): orchestration, RCA, ELK integration and SKS calls</a:t>
-            </a:r>
-          </a:p>
-          <a:p>
-            <a:r>
-              <a:t>• SentinelAI-Engine (FastAPI): provider routing for Groq, Ollama, OpenAI and HuggingFace</a:t>
-            </a:r>
-          </a:p>
-          <a:p>
-            <a:r>
-              <a:t>• SentinelAI-Knowledge-Service (Spring Boot): timeline, releases, deployments and Jira knowledge</a:t>
-            </a:r>
-          </a:p>
-          <a:p/>
-          <a:p>
-            <a:r>
-              <a:t>Infrastructure: PostgreSQL + pgvector, Elasticsearch, Ollama, Docker</a:t>
-            </a:r>
-          </a:p>
-          <a:p/>
-          <a:p>
-            <a:r>
+          <a:p>
+            <a:endParaRPr dirty="0"/>
+          </a:p>
+          <a:p>
+            <a:r>
+              <a:rPr dirty="0"/>
+              <a:t>• </a:t>
+            </a:r>
+            <a:r>
+              <a:rPr dirty="0" err="1"/>
+              <a:t>sentinelai-ui</a:t>
+            </a:r>
+            <a:r>
+              <a:rPr dirty="0"/>
+              <a:t> (React): RCA and ELK investigation views</a:t>
+            </a:r>
+          </a:p>
+          <a:p>
+            <a:r>
+              <a:rPr dirty="0"/>
+              <a:t>• </a:t>
+            </a:r>
+            <a:r>
+              <a:rPr dirty="0" err="1"/>
+              <a:t>SentinelAI</a:t>
+            </a:r>
+            <a:r>
+              <a:rPr dirty="0"/>
+              <a:t>-Core (Spring Boot): orchestration, RCA, ELK integration and SKS calls</a:t>
+            </a:r>
+          </a:p>
+          <a:p>
+            <a:r>
+              <a:rPr dirty="0"/>
+              <a:t>• </a:t>
+            </a:r>
+            <a:r>
+              <a:rPr dirty="0" err="1"/>
+              <a:t>SentinelAI</a:t>
+            </a:r>
+            <a:r>
+              <a:rPr dirty="0"/>
+              <a:t>-Engine (</a:t>
+            </a:r>
+            <a:r>
+              <a:rPr dirty="0" err="1"/>
+              <a:t>FastAPI</a:t>
+            </a:r>
+            <a:r>
+              <a:rPr dirty="0"/>
+              <a:t>): provider routing for </a:t>
+            </a:r>
+            <a:r>
+              <a:rPr dirty="0" err="1"/>
+              <a:t>Groq</a:t>
+            </a:r>
+            <a:r>
+              <a:rPr dirty="0"/>
+              <a:t>, </a:t>
+            </a:r>
+            <a:r>
+              <a:rPr dirty="0" err="1"/>
+              <a:t>Ollama</a:t>
+            </a:r>
+            <a:r>
+              <a:rPr dirty="0"/>
+              <a:t>, OpenAI and </a:t>
+            </a:r>
+            <a:r>
+              <a:rPr dirty="0" err="1"/>
+              <a:t>HuggingFace</a:t>
+            </a:r>
+            <a:endParaRPr dirty="0"/>
+          </a:p>
+          <a:p>
+            <a:r>
+              <a:rPr dirty="0"/>
+              <a:t>• </a:t>
+            </a:r>
+            <a:r>
+              <a:rPr dirty="0" err="1"/>
+              <a:t>SentinelAI</a:t>
+            </a:r>
+            <a:r>
+              <a:rPr dirty="0"/>
+              <a:t>-Knowledge-Service (Spring Boot): timeline, releases, deployments and Jira knowledge</a:t>
+            </a:r>
+          </a:p>
+          <a:p>
+            <a:endParaRPr dirty="0"/>
+          </a:p>
+          <a:p>
+            <a:r>
+              <a:rPr dirty="0"/>
+              <a:t>Infrastructure: PostgreSQL + </a:t>
+            </a:r>
+            <a:r>
+              <a:rPr dirty="0" err="1"/>
+              <a:t>pgvector</a:t>
+            </a:r>
+            <a:r>
+              <a:rPr dirty="0"/>
+              <a:t>, Elasticsearch, </a:t>
+            </a:r>
+            <a:r>
+              <a:rPr dirty="0" err="1"/>
+              <a:t>Ollama</a:t>
+            </a:r>
+            <a:r>
+              <a:rPr dirty="0"/>
+              <a:t>, Docker</a:t>
+            </a:r>
+          </a:p>
+          <a:p>
+            <a:endParaRPr dirty="0"/>
+          </a:p>
+          <a:p>
+            <a:r>
+              <a:rPr dirty="0"/>
               <a:t>Draw.io reference: SentinelAI-Architecture-v2.drawio</a:t>
             </a:r>
           </a:p>
@@ -15846,7 +15990,7 @@
           <a:p>
             <a:pPr algn="l"/>
             <a:r>
-              <a:rPr sz="1200" b="0" i="0">
+              <a:rPr sz="1200" b="0" i="0" dirty="0">
                 <a:solidFill>
                   <a:srgbClr val="B0BBC9"/>
                 </a:solidFill>
@@ -16643,7 +16787,7 @@
           <a:p>
             <a:pPr algn="l"/>
             <a:r>
-              <a:rPr sz="2600" b="1" i="0">
+              <a:rPr sz="2600" b="1" i="0" dirty="0">
                 <a:solidFill>
                   <a:srgbClr val="FFFFFF"/>
                 </a:solidFill>
@@ -18147,7 +18291,7 @@
           <a:p>
             <a:pPr algn="l"/>
             <a:r>
-              <a:rPr sz="2600" b="1" i="0">
+              <a:rPr sz="2600" b="1" i="0" dirty="0">
                 <a:solidFill>
                   <a:srgbClr val="FFFFFF"/>
                 </a:solidFill>
@@ -19607,7 +19751,9 @@
               <a:t>Every investigation becomes reusable knowledge</a:t>
             </a:r>
           </a:p>
-          <a:p/>
+          <a:p>
+            <a:endParaRPr/>
+          </a:p>
           <a:p>
             <a:r>
               <a:t>• Core can call SentinelAI-Knowledge-Service for timeline, deployment, release and Jira evidence</a:t>
